--- a/docs/content/factors/factors_lecture.pptx
+++ b/docs/content/factors/factors_lecture.pptx
@@ -3307,7 +3307,7 @@
             </a:pPr>
             <a:r>
               <a:rPr/>
-              <a:t>Lecture 10 — Factors: Taming Categorical Data</a:t>
+              <a:t>Lecture 16 — Factors: Taming Categorical Data</a:t>
             </a:r>
           </a:p>
         </p:txBody>
@@ -3368,7 +3368,7 @@
             </a:pPr>
             <a:r>
               <a:rPr/>
-              <a:t>2026-07-05</a:t>
+              <a:t>2026-08-27</a:t>
             </a:r>
           </a:p>
         </p:txBody>
@@ -5162,7 +5162,7 @@
                 </a:solidFill>
                 <a:latin typeface="Courier"/>
               </a:rPr>
-              <a:t>"steelblue"</a:t>
+              <a:t>"darkblue"</a:t>
             </a:r>
             <a:r>
               <a:rPr>
@@ -6765,15 +6765,7 @@
             </a:r>
             <a:r>
               <a:rPr sz="2000"/>
-              <a:t> package. You’ll lean on it again next week when you run a one-way </a:t>
-            </a:r>
-            <a:r>
-              <a:rPr sz="2000" b="1"/>
-              <a:t>ANOVA</a:t>
-            </a:r>
-            <a:r>
-              <a:rPr sz="2000"/>
-              <a:t>.</a:t>
+              <a:t> package. You already used this kind of grouping variable back in the one-way ANOVA (Lecture 13) — today you learn to control how it displays.</a:t>
             </a:r>
           </a:p>
         </p:txBody>
@@ -7807,7 +7799,7 @@
             </a:r>
             <a:r>
               <a:rPr sz="2000"/>
-              <a:t> When you fit a model — the regression from Lecture 06, or the ANOVA coming next week — R compares everything to the </a:t>
+              <a:t> When you fit a model — the regression from Lecture 11, or the ANOVA from Lecture 13 — R compares everything to the </a:t>
             </a:r>
             <a:r>
               <a:rPr sz="2000" b="1"/>
@@ -9775,11 +9767,27 @@
             </a:pPr>
             <a:r>
               <a:rPr/>
-              <a:t>This is the everyday payoff: </a:t>
-            </a:r>
-            <a:r>
-              <a:rPr b="1"/>
-              <a:t>factors are how you make categorical plots say what you mean.</a:t>
+              <a:t>Notice nothing here required touching the underlying data frame outside the pipe — </a:t>
+            </a:r>
+            <a:r>
+              <a:rPr>
+                <a:latin typeface="Courier"/>
+              </a:rPr>
+              <a:t>fct_recode()</a:t>
+            </a:r>
+            <a:r>
+              <a:rPr/>
+              <a:t> and </a:t>
+            </a:r>
+            <a:r>
+              <a:rPr>
+                <a:latin typeface="Courier"/>
+              </a:rPr>
+              <a:t>fct_reorder()</a:t>
+            </a:r>
+            <a:r>
+              <a:rPr/>
+              <a:t> did all the work on the fly, right where the plot is built.</a:t>
             </a:r>
           </a:p>
         </p:txBody>
@@ -10140,25 +10148,25 @@
             </a:pPr>
             <a:r>
               <a:rPr b="1"/>
-              <a:t>Up next — Lecture 11:</a:t>
+              <a:t>Up next — Lecture 17:</a:t>
             </a:r>
           </a:p>
           <a:p>
             <a:pPr lvl="0"/>
             <a:r>
               <a:rPr b="1"/>
-              <a:t>One-way ANOVA</a:t>
-            </a:r>
-            <a:r>
-              <a:rPr/>
-              <a:t> — compare a numeric response across three or more groups</a:t>
+              <a:t>Joins</a:t>
+            </a:r>
+            <a:r>
+              <a:rPr/>
+              <a:t> — combine two tables on a shared key</a:t>
             </a:r>
           </a:p>
           <a:p>
             <a:pPr lvl="0"/>
             <a:r>
               <a:rPr/>
-              <a:t>Your factor levels are now in order, so the group comparisons read cleanly</a:t>
+              <a:t>The prerequisite for bigger datasets — and for maps</a:t>
             </a:r>
           </a:p>
         </p:txBody>
@@ -10687,23 +10695,15 @@
           <a:p>
             <a:pPr lvl="0"/>
             <a:r>
-              <a:rPr sz="2000" b="1"/>
-              <a:t>Predicting the order</a:t>
-            </a:r>
-            <a:r>
               <a:rPr sz="2000"/>
-              <a:t> of a plot forces you to reason about levels — the whole point of factors.</a:t>
+              <a:t>With factors, “predict the output” almost always means “predict the order the bars will appear in” — forcing that guess is what makes you actually think about levels instead of ggplot’s defaults.</a:t>
             </a:r>
           </a:p>
           <a:p>
             <a:pPr lvl="0"/>
             <a:r>
-              <a:rPr sz="2000" b="1"/>
-              <a:t>Typing by hand</a:t>
-            </a:r>
-            <a:r>
               <a:rPr sz="2000"/>
-              <a:t> builds the muscle memory for the </a:t>
+              <a:t>The </a:t>
             </a:r>
             <a:r>
               <a:rPr sz="2000">
@@ -10713,18 +10713,34 @@
             </a:r>
             <a:r>
               <a:rPr sz="2000"/>
-              <a:t> family.</a:t>
+              <a:t> functions all take a similar shape (</a:t>
+            </a:r>
+            <a:r>
+              <a:rPr sz="2000">
+                <a:latin typeface="Courier"/>
+              </a:rPr>
+              <a:t>fct_something(factor, ...)</a:t>
+            </a:r>
+            <a:r>
+              <a:rPr sz="2000"/>
+              <a:t>), and typing them out enough times is what gets that shape into your fingers.</a:t>
             </a:r>
           </a:p>
           <a:p>
             <a:pPr lvl="0"/>
             <a:r>
-              <a:rPr sz="2000" b="1"/>
-              <a:t>Chunk → practice</a:t>
-            </a:r>
-            <a:r>
               <a:rPr sz="2000"/>
-              <a:t> keeps each idea in working memory long enough to stick.</a:t>
+              <a:t>Two days of new </a:t>
+            </a:r>
+            <a:r>
+              <a:rPr sz="2000">
+                <a:latin typeface="Courier"/>
+              </a:rPr>
+              <a:t>fct_</a:t>
+            </a:r>
+            <a:r>
+              <a:rPr sz="2000"/>
+              <a:t> verbs is a lot to hold onto — using each one in the activity right after you see it in lecture is what keeps Day 1’s functions available when Day 2 builds on them.</a:t>
             </a:r>
           </a:p>
         </p:txBody>
